--- a/docs/システム構成図.pptx
+++ b/docs/システム構成図.pptx
@@ -3336,7 +3336,7 @@
                 <a:latin typeface="Meiryo"/>
                 <a:ea typeface="Meiryo"/>
               </a:rPr>
-              <a:t>毎日3回：07:00 / 12:00 / 18:00 JST（cron起動）</a:t>
+              <a:t>毎日3回：07:30 / 12:00 / 18:00 JST（cron起動）</a:t>
             </a:r>
           </a:p>
         </p:txBody>

--- a/docs/システム構成図.pptx
+++ b/docs/システム構成図.pptx
@@ -3336,7 +3336,7 @@
                 <a:latin typeface="Meiryo"/>
                 <a:ea typeface="Meiryo"/>
               </a:rPr>
-              <a:t>毎日3回：07:30 / 12:00 / 18:00 JST（cron起動）</a:t>
+              <a:t>毎日3回：07:37 / 12:07 / 17:53 JST（cron起動）</a:t>
             </a:r>
           </a:p>
         </p:txBody>

--- a/docs/システム構成図.pptx
+++ b/docs/システム構成図.pptx
@@ -6,6 +6,7 @@
   </p:sldMasterIdLst>
   <p:sldIdLst>
     <p:sldId id="256" r:id="rId7"/>
+    <p:sldId id="257" r:id="rId8"/>
   </p:sldIdLst>
   <p:sldSz cx="12191695" cy="6858000" type="screen4x3"/>
   <p:notesSz cx="6858000" cy="9144000"/>
@@ -4523,6 +4524,1370 @@
                 <a:ea typeface="Meiryo"/>
               </a:rPr>
               <a:t>※ 起動は外部スケジューラ(cron-job.org)から workflow_dispatch API で行う（GitHub schedule は時刻保証がなく不採用）／ 配信は一方向 push ／ PC の常時起動は不要</a:t>
+            </a:r>
+          </a:p>
+        </p:txBody>
+      </p:sp>
+    </p:spTree>
+  </p:cSld>
+  <p:clrMapOvr>
+    <a:masterClrMapping/>
+  </p:clrMapOvr>
+</p:sld>
+</file>
+
+<file path=ppt/slides/slide2.xml><?xml version="1.0" encoding="utf-8"?>
+<p:sld xmlns:a="http://schemas.openxmlformats.org/drawingml/2006/main" xmlns:p="http://schemas.openxmlformats.org/presentationml/2006/main" xmlns:r="http://schemas.openxmlformats.org/officeDocument/2006/relationships">
+  <p:cSld>
+    <p:spTree>
+      <p:nvGrpSpPr>
+        <p:cNvPr id="1" name=""/>
+        <p:cNvGrpSpPr/>
+        <p:nvPr/>
+      </p:nvGrpSpPr>
+      <p:grpSpPr/>
+      <p:sp>
+        <p:nvSpPr>
+          <p:cNvPr id="2" name="TextBox 1"/>
+          <p:cNvSpPr txBox="1"/>
+          <p:nvPr/>
+        </p:nvSpPr>
+        <p:spPr>
+          <a:xfrm>
+            <a:off x="274320" y="109728"/>
+            <a:ext cx="11612880" cy="502920"/>
+          </a:xfrm>
+          <a:prstGeom prst="rect">
+            <a:avLst/>
+          </a:prstGeom>
+          <a:noFill/>
+        </p:spPr>
+        <p:txBody>
+          <a:bodyPr wrap="square">
+            <a:spAutoFit/>
+          </a:bodyPr>
+          <a:lstStyle/>
+          <a:p>
+            <a:pPr algn="ctr"/>
+            <a:r>
+              <a:rPr sz="2000" b="1">
+                <a:solidFill>
+                  <a:srgbClr val="262626"/>
+                </a:solidFill>
+                <a:latin typeface="Meiryo"/>
+                <a:ea typeface="Meiryo"/>
+              </a:rPr>
+              <a:t>商用サービス構成案（無料枠の制限を解消し品質・信頼性を担保）</a:t>
+            </a:r>
+          </a:p>
+        </p:txBody>
+      </p:sp>
+      <p:sp>
+        <p:nvSpPr>
+          <p:cNvPr id="3" name="Rounded Rectangle 2"/>
+          <p:cNvSpPr/>
+          <p:nvPr/>
+        </p:nvSpPr>
+        <p:spPr>
+          <a:xfrm>
+            <a:off x="137160" y="1188720"/>
+            <a:ext cx="2011680" cy="1097280"/>
+          </a:xfrm>
+          <a:prstGeom prst="roundRect">
+            <a:avLst/>
+          </a:prstGeom>
+          <a:solidFill>
+            <a:srgbClr val="FCE4D6"/>
+          </a:solidFill>
+          <a:ln w="15875">
+            <a:solidFill>
+              <a:srgbClr val="7F7F7F"/>
+            </a:solidFill>
+          </a:ln>
+          <a:effectLst/>
+        </p:spPr>
+        <p:style>
+          <a:lnRef idx="1">
+            <a:schemeClr val="accent1"/>
+          </a:lnRef>
+          <a:fillRef idx="3">
+            <a:schemeClr val="accent1"/>
+          </a:fillRef>
+          <a:effectRef idx="2">
+            <a:schemeClr val="accent1"/>
+          </a:effectRef>
+          <a:fontRef idx="minor">
+            <a:schemeClr val="lt1"/>
+          </a:fontRef>
+        </p:style>
+        <p:txBody>
+          <a:bodyPr rtlCol="0" anchor="ctr" wrap="square" tIns="38100" bIns="38100"/>
+          <a:lstStyle/>
+          <a:p>
+            <a:pPr algn="ctr"/>
+            <a:r>
+              <a:rPr sz="1100" b="1">
+                <a:solidFill>
+                  <a:srgbClr val="262626"/>
+                </a:solidFill>
+                <a:latin typeface="Meiryo"/>
+                <a:ea typeface="Meiryo"/>
+              </a:rPr>
+              <a:t>マネージド</a:t>
+            </a:r>
+          </a:p>
+          <a:p>
+            <a:pPr algn="ctr"/>
+            <a:r>
+              <a:rPr sz="950" b="0">
+                <a:solidFill>
+                  <a:srgbClr val="262626"/>
+                </a:solidFill>
+                <a:latin typeface="Meiryo"/>
+                <a:ea typeface="Meiryo"/>
+              </a:rPr>
+              <a:t>スケジューラ</a:t>
+            </a:r>
+          </a:p>
+          <a:p>
+            <a:pPr algn="ctr"/>
+            <a:r>
+              <a:rPr sz="950" b="0">
+                <a:solidFill>
+                  <a:srgbClr val="262626"/>
+                </a:solidFill>
+                <a:latin typeface="Meiryo"/>
+                <a:ea typeface="Meiryo"/>
+              </a:rPr>
+              <a:t>SLA保証・定時起動</a:t>
+            </a:r>
+          </a:p>
+        </p:txBody>
+      </p:sp>
+      <p:sp>
+        <p:nvSpPr>
+          <p:cNvPr id="4" name="Rounded Rectangle 3"/>
+          <p:cNvSpPr/>
+          <p:nvPr/>
+        </p:nvSpPr>
+        <p:spPr>
+          <a:xfrm>
+            <a:off x="2331720" y="1188720"/>
+            <a:ext cx="1828800" cy="1097280"/>
+          </a:xfrm>
+          <a:prstGeom prst="roundRect">
+            <a:avLst/>
+          </a:prstGeom>
+          <a:solidFill>
+            <a:srgbClr val="FFF2CC"/>
+          </a:solidFill>
+          <a:ln w="15875">
+            <a:solidFill>
+              <a:srgbClr val="7F7F7F"/>
+            </a:solidFill>
+          </a:ln>
+          <a:effectLst/>
+        </p:spPr>
+        <p:style>
+          <a:lnRef idx="1">
+            <a:schemeClr val="accent1"/>
+          </a:lnRef>
+          <a:fillRef idx="3">
+            <a:schemeClr val="accent1"/>
+          </a:fillRef>
+          <a:effectRef idx="2">
+            <a:schemeClr val="accent1"/>
+          </a:effectRef>
+          <a:fontRef idx="minor">
+            <a:schemeClr val="lt1"/>
+          </a:fontRef>
+        </p:style>
+        <p:txBody>
+          <a:bodyPr rtlCol="0" anchor="ctr" wrap="square" tIns="38100" bIns="38100"/>
+          <a:lstStyle/>
+          <a:p>
+            <a:pPr algn="ctr"/>
+            <a:r>
+              <a:rPr sz="1100" b="1">
+                <a:solidFill>
+                  <a:srgbClr val="262626"/>
+                </a:solidFill>
+                <a:latin typeface="Meiryo"/>
+                <a:ea typeface="Meiryo"/>
+              </a:rPr>
+              <a:t>キュー + DLQ</a:t>
+            </a:r>
+          </a:p>
+          <a:p>
+            <a:pPr algn="ctr"/>
+            <a:r>
+              <a:rPr sz="950" b="0">
+                <a:solidFill>
+                  <a:srgbClr val="262626"/>
+                </a:solidFill>
+                <a:latin typeface="Meiryo"/>
+                <a:ea typeface="Meiryo"/>
+              </a:rPr>
+              <a:t>疎結合・再試行</a:t>
+            </a:r>
+          </a:p>
+          <a:p>
+            <a:pPr algn="ctr"/>
+            <a:r>
+              <a:rPr sz="950" b="0">
+                <a:solidFill>
+                  <a:srgbClr val="262626"/>
+                </a:solidFill>
+                <a:latin typeface="Meiryo"/>
+                <a:ea typeface="Meiryo"/>
+              </a:rPr>
+              <a:t>デッドレター</a:t>
+            </a:r>
+          </a:p>
+        </p:txBody>
+      </p:sp>
+      <p:sp>
+        <p:nvSpPr>
+          <p:cNvPr id="5" name="Rounded Rectangle 4"/>
+          <p:cNvSpPr/>
+          <p:nvPr/>
+        </p:nvSpPr>
+        <p:spPr>
+          <a:xfrm>
+            <a:off x="4343400" y="1188720"/>
+            <a:ext cx="2194560" cy="1097280"/>
+          </a:xfrm>
+          <a:prstGeom prst="roundRect">
+            <a:avLst/>
+          </a:prstGeom>
+          <a:solidFill>
+            <a:srgbClr val="DEEBF7"/>
+          </a:solidFill>
+          <a:ln w="15875">
+            <a:solidFill>
+              <a:srgbClr val="7F7F7F"/>
+            </a:solidFill>
+          </a:ln>
+          <a:effectLst/>
+        </p:spPr>
+        <p:style>
+          <a:lnRef idx="1">
+            <a:schemeClr val="accent1"/>
+          </a:lnRef>
+          <a:fillRef idx="3">
+            <a:schemeClr val="accent1"/>
+          </a:fillRef>
+          <a:effectRef idx="2">
+            <a:schemeClr val="accent1"/>
+          </a:effectRef>
+          <a:fontRef idx="minor">
+            <a:schemeClr val="lt1"/>
+          </a:fontRef>
+        </p:style>
+        <p:txBody>
+          <a:bodyPr rtlCol="0" anchor="ctr" wrap="square" tIns="38100" bIns="38100"/>
+          <a:lstStyle/>
+          <a:p>
+            <a:pPr algn="ctr"/>
+            <a:r>
+              <a:rPr sz="1100" b="1">
+                <a:solidFill>
+                  <a:srgbClr val="262626"/>
+                </a:solidFill>
+                <a:latin typeface="Meiryo"/>
+                <a:ea typeface="Meiryo"/>
+              </a:rPr>
+              <a:t>コンピュート</a:t>
+            </a:r>
+          </a:p>
+          <a:p>
+            <a:pPr algn="ctr"/>
+            <a:r>
+              <a:rPr sz="950" b="0">
+                <a:solidFill>
+                  <a:srgbClr val="262626"/>
+                </a:solidFill>
+                <a:latin typeface="Meiryo"/>
+                <a:ea typeface="Meiryo"/>
+              </a:rPr>
+              <a:t>（オーケストレーション）</a:t>
+            </a:r>
+          </a:p>
+          <a:p>
+            <a:pPr algn="ctr"/>
+            <a:r>
+              <a:rPr sz="950" b="0">
+                <a:solidFill>
+                  <a:srgbClr val="262626"/>
+                </a:solidFill>
+                <a:latin typeface="Meiryo"/>
+                <a:ea typeface="Meiryo"/>
+              </a:rPr>
+              <a:t>オートスケール</a:t>
+            </a:r>
+          </a:p>
+        </p:txBody>
+      </p:sp>
+      <p:sp>
+        <p:nvSpPr>
+          <p:cNvPr id="6" name="Rounded Rectangle 5"/>
+          <p:cNvSpPr/>
+          <p:nvPr/>
+        </p:nvSpPr>
+        <p:spPr>
+          <a:xfrm>
+            <a:off x="6720840" y="1188720"/>
+            <a:ext cx="2194560" cy="1097280"/>
+          </a:xfrm>
+          <a:prstGeom prst="roundRect">
+            <a:avLst/>
+          </a:prstGeom>
+          <a:solidFill>
+            <a:srgbClr val="E4DFEC"/>
+          </a:solidFill>
+          <a:ln w="15875">
+            <a:solidFill>
+              <a:srgbClr val="7F7F7F"/>
+            </a:solidFill>
+          </a:ln>
+          <a:effectLst/>
+        </p:spPr>
+        <p:style>
+          <a:lnRef idx="1">
+            <a:schemeClr val="accent1"/>
+          </a:lnRef>
+          <a:fillRef idx="3">
+            <a:schemeClr val="accent1"/>
+          </a:fillRef>
+          <a:effectRef idx="2">
+            <a:schemeClr val="accent1"/>
+          </a:effectRef>
+          <a:fontRef idx="minor">
+            <a:schemeClr val="lt1"/>
+          </a:fontRef>
+        </p:style>
+        <p:txBody>
+          <a:bodyPr rtlCol="0" anchor="ctr" wrap="square" tIns="38100" bIns="38100"/>
+          <a:lstStyle/>
+          <a:p>
+            <a:pPr algn="ctr"/>
+            <a:r>
+              <a:rPr sz="1100" b="1">
+                <a:solidFill>
+                  <a:srgbClr val="262626"/>
+                </a:solidFill>
+                <a:latin typeface="Meiryo"/>
+                <a:ea typeface="Meiryo"/>
+              </a:rPr>
+              <a:t>AI：有料LLM</a:t>
+            </a:r>
+          </a:p>
+          <a:p>
+            <a:pPr algn="ctr"/>
+            <a:r>
+              <a:rPr sz="950" b="0">
+                <a:solidFill>
+                  <a:srgbClr val="262626"/>
+                </a:solidFill>
+                <a:latin typeface="Meiryo"/>
+                <a:ea typeface="Meiryo"/>
+              </a:rPr>
+              <a:t>高レート上限</a:t>
+            </a:r>
+          </a:p>
+          <a:p>
+            <a:pPr algn="ctr"/>
+            <a:r>
+              <a:rPr sz="950" b="0">
+                <a:solidFill>
+                  <a:srgbClr val="262626"/>
+                </a:solidFill>
+                <a:latin typeface="Meiryo"/>
+                <a:ea typeface="Meiryo"/>
+              </a:rPr>
+              <a:t>フォールバック</a:t>
+            </a:r>
+          </a:p>
+        </p:txBody>
+      </p:sp>
+      <p:sp>
+        <p:nvSpPr>
+          <p:cNvPr id="7" name="Rounded Rectangle 6"/>
+          <p:cNvSpPr/>
+          <p:nvPr/>
+        </p:nvSpPr>
+        <p:spPr>
+          <a:xfrm>
+            <a:off x="9098280" y="1188720"/>
+            <a:ext cx="2194560" cy="1097280"/>
+          </a:xfrm>
+          <a:prstGeom prst="roundRect">
+            <a:avLst/>
+          </a:prstGeom>
+          <a:solidFill>
+            <a:srgbClr val="C6EFCE"/>
+          </a:solidFill>
+          <a:ln w="15875">
+            <a:solidFill>
+              <a:srgbClr val="7F7F7F"/>
+            </a:solidFill>
+          </a:ln>
+          <a:effectLst/>
+        </p:spPr>
+        <p:style>
+          <a:lnRef idx="1">
+            <a:schemeClr val="accent1"/>
+          </a:lnRef>
+          <a:fillRef idx="3">
+            <a:schemeClr val="accent1"/>
+          </a:fillRef>
+          <a:effectRef idx="2">
+            <a:schemeClr val="accent1"/>
+          </a:effectRef>
+          <a:fontRef idx="minor">
+            <a:schemeClr val="lt1"/>
+          </a:fontRef>
+        </p:style>
+        <p:txBody>
+          <a:bodyPr rtlCol="0" anchor="ctr" wrap="square" tIns="38100" bIns="38100"/>
+          <a:lstStyle/>
+          <a:p>
+            <a:pPr algn="ctr"/>
+            <a:r>
+              <a:rPr sz="1100" b="1">
+                <a:solidFill>
+                  <a:srgbClr val="262626"/>
+                </a:solidFill>
+                <a:latin typeface="Meiryo"/>
+                <a:ea typeface="Meiryo"/>
+              </a:rPr>
+              <a:t>配信基盤</a:t>
+            </a:r>
+          </a:p>
+          <a:p>
+            <a:pPr algn="ctr"/>
+            <a:r>
+              <a:rPr sz="950" b="0">
+                <a:solidFill>
+                  <a:srgbClr val="262626"/>
+                </a:solidFill>
+                <a:latin typeface="Meiryo"/>
+                <a:ea typeface="Meiryo"/>
+              </a:rPr>
+              <a:t>配信キュー</a:t>
+            </a:r>
+          </a:p>
+          <a:p>
+            <a:pPr algn="ctr"/>
+            <a:r>
+              <a:rPr sz="950" b="0">
+                <a:solidFill>
+                  <a:srgbClr val="262626"/>
+                </a:solidFill>
+                <a:latin typeface="Meiryo"/>
+                <a:ea typeface="Meiryo"/>
+              </a:rPr>
+              <a:t>レート制御・再試行</a:t>
+            </a:r>
+          </a:p>
+        </p:txBody>
+      </p:sp>
+      <p:sp>
+        <p:nvSpPr>
+          <p:cNvPr id="8" name="Rounded Rectangle 7"/>
+          <p:cNvSpPr/>
+          <p:nvPr/>
+        </p:nvSpPr>
+        <p:spPr>
+          <a:xfrm>
+            <a:off x="4343400" y="2834640"/>
+            <a:ext cx="2194560" cy="914400"/>
+          </a:xfrm>
+          <a:prstGeom prst="roundRect">
+            <a:avLst/>
+          </a:prstGeom>
+          <a:solidFill>
+            <a:srgbClr val="E2EFDA"/>
+          </a:solidFill>
+          <a:ln w="15875">
+            <a:solidFill>
+              <a:srgbClr val="7F7F7F"/>
+            </a:solidFill>
+          </a:ln>
+          <a:effectLst/>
+        </p:spPr>
+        <p:style>
+          <a:lnRef idx="1">
+            <a:schemeClr val="accent1"/>
+          </a:lnRef>
+          <a:fillRef idx="3">
+            <a:schemeClr val="accent1"/>
+          </a:fillRef>
+          <a:effectRef idx="2">
+            <a:schemeClr val="accent1"/>
+          </a:effectRef>
+          <a:fontRef idx="minor">
+            <a:schemeClr val="lt1"/>
+          </a:fontRef>
+        </p:style>
+        <p:txBody>
+          <a:bodyPr rtlCol="0" anchor="ctr" wrap="square" tIns="38100" bIns="38100"/>
+          <a:lstStyle/>
+          <a:p>
+            <a:pPr algn="ctr"/>
+            <a:r>
+              <a:rPr sz="1100" b="1">
+                <a:solidFill>
+                  <a:srgbClr val="262626"/>
+                </a:solidFill>
+                <a:latin typeface="Meiryo"/>
+                <a:ea typeface="Meiryo"/>
+              </a:rPr>
+              <a:t>収集</a:t>
+            </a:r>
+          </a:p>
+          <a:p>
+            <a:pPr algn="ctr"/>
+            <a:r>
+              <a:rPr sz="950" b="0">
+                <a:solidFill>
+                  <a:srgbClr val="262626"/>
+                </a:solidFill>
+                <a:latin typeface="Meiryo"/>
+                <a:ea typeface="Meiryo"/>
+              </a:rPr>
+              <a:t>RSS + 本文全文取得</a:t>
+            </a:r>
+          </a:p>
+        </p:txBody>
+      </p:sp>
+      <p:sp>
+        <p:nvSpPr>
+          <p:cNvPr id="9" name="Rounded Rectangle 8"/>
+          <p:cNvSpPr/>
+          <p:nvPr/>
+        </p:nvSpPr>
+        <p:spPr>
+          <a:xfrm>
+            <a:off x="6720840" y="2834640"/>
+            <a:ext cx="2194560" cy="914400"/>
+          </a:xfrm>
+          <a:prstGeom prst="roundRect">
+            <a:avLst/>
+          </a:prstGeom>
+          <a:solidFill>
+            <a:srgbClr val="D6EEF0"/>
+          </a:solidFill>
+          <a:ln w="15875">
+            <a:solidFill>
+              <a:srgbClr val="7F7F7F"/>
+            </a:solidFill>
+          </a:ln>
+          <a:effectLst/>
+        </p:spPr>
+        <p:style>
+          <a:lnRef idx="1">
+            <a:schemeClr val="accent1"/>
+          </a:lnRef>
+          <a:fillRef idx="3">
+            <a:schemeClr val="accent1"/>
+          </a:fillRef>
+          <a:effectRef idx="2">
+            <a:schemeClr val="accent1"/>
+          </a:effectRef>
+          <a:fontRef idx="minor">
+            <a:schemeClr val="lt1"/>
+          </a:fontRef>
+        </p:style>
+        <p:txBody>
+          <a:bodyPr rtlCol="0" anchor="ctr" wrap="square" tIns="38100" bIns="38100"/>
+          <a:lstStyle/>
+          <a:p>
+            <a:pPr algn="ctr"/>
+            <a:r>
+              <a:rPr sz="1050" b="1">
+                <a:solidFill>
+                  <a:srgbClr val="262626"/>
+                </a:solidFill>
+                <a:latin typeface="Meiryo"/>
+                <a:ea typeface="Meiryo"/>
+              </a:rPr>
+              <a:t>マネージドDB</a:t>
+            </a:r>
+          </a:p>
+          <a:p>
+            <a:pPr algn="ctr"/>
+            <a:r>
+              <a:rPr sz="900" b="0">
+                <a:solidFill>
+                  <a:srgbClr val="262626"/>
+                </a:solidFill>
+                <a:latin typeface="Meiryo"/>
+                <a:ea typeface="Meiryo"/>
+              </a:rPr>
+              <a:t>配信履歴・重複排除・購読/設定</a:t>
+            </a:r>
+          </a:p>
+        </p:txBody>
+      </p:sp>
+      <p:sp>
+        <p:nvSpPr>
+          <p:cNvPr id="10" name="Rounded Rectangle 9"/>
+          <p:cNvSpPr/>
+          <p:nvPr/>
+        </p:nvSpPr>
+        <p:spPr>
+          <a:xfrm>
+            <a:off x="9098280" y="2834640"/>
+            <a:ext cx="2194560" cy="914400"/>
+          </a:xfrm>
+          <a:prstGeom prst="roundRect">
+            <a:avLst/>
+          </a:prstGeom>
+          <a:solidFill>
+            <a:srgbClr val="C6EFCE"/>
+          </a:solidFill>
+          <a:ln w="15875">
+            <a:solidFill>
+              <a:srgbClr val="7F7F7F"/>
+            </a:solidFill>
+          </a:ln>
+          <a:effectLst/>
+        </p:spPr>
+        <p:style>
+          <a:lnRef idx="1">
+            <a:schemeClr val="accent1"/>
+          </a:lnRef>
+          <a:fillRef idx="3">
+            <a:schemeClr val="accent1"/>
+          </a:fillRef>
+          <a:effectRef idx="2">
+            <a:schemeClr val="accent1"/>
+          </a:effectRef>
+          <a:fontRef idx="minor">
+            <a:schemeClr val="lt1"/>
+          </a:fontRef>
+        </p:style>
+        <p:txBody>
+          <a:bodyPr rtlCol="0" anchor="ctr" wrap="square" tIns="38100" bIns="38100"/>
+          <a:lstStyle/>
+          <a:p>
+            <a:pPr algn="ctr"/>
+            <a:r>
+              <a:rPr sz="1050" b="1">
+                <a:solidFill>
+                  <a:srgbClr val="262626"/>
+                </a:solidFill>
+                <a:latin typeface="Meiryo"/>
+                <a:ea typeface="Meiryo"/>
+              </a:rPr>
+              <a:t>マルチチャネル配信</a:t>
+            </a:r>
+          </a:p>
+          <a:p>
+            <a:pPr algn="ctr"/>
+            <a:r>
+              <a:rPr sz="900" b="0">
+                <a:solidFill>
+                  <a:srgbClr val="262626"/>
+                </a:solidFill>
+                <a:latin typeface="Meiryo"/>
+                <a:ea typeface="Meiryo"/>
+              </a:rPr>
+              <a:t>LINE有料 / Email / Web Push</a:t>
+            </a:r>
+          </a:p>
+        </p:txBody>
+      </p:sp>
+      <p:sp>
+        <p:nvSpPr>
+          <p:cNvPr id="11" name="Rounded Rectangle 10"/>
+          <p:cNvSpPr/>
+          <p:nvPr/>
+        </p:nvSpPr>
+        <p:spPr>
+          <a:xfrm>
+            <a:off x="9098280" y="3931920"/>
+            <a:ext cx="2194560" cy="530352"/>
+          </a:xfrm>
+          <a:prstGeom prst="roundRect">
+            <a:avLst/>
+          </a:prstGeom>
+          <a:solidFill>
+            <a:srgbClr val="FFFFFF"/>
+          </a:solidFill>
+          <a:ln w="15875">
+            <a:solidFill>
+              <a:srgbClr val="7F7F7F"/>
+            </a:solidFill>
+          </a:ln>
+          <a:effectLst/>
+        </p:spPr>
+        <p:style>
+          <a:lnRef idx="1">
+            <a:schemeClr val="accent1"/>
+          </a:lnRef>
+          <a:fillRef idx="3">
+            <a:schemeClr val="accent1"/>
+          </a:fillRef>
+          <a:effectRef idx="2">
+            <a:schemeClr val="accent1"/>
+          </a:effectRef>
+          <a:fontRef idx="minor">
+            <a:schemeClr val="lt1"/>
+          </a:fontRef>
+        </p:style>
+        <p:txBody>
+          <a:bodyPr rtlCol="0" anchor="ctr" wrap="square" tIns="38100" bIns="38100"/>
+          <a:lstStyle/>
+          <a:p>
+            <a:pPr algn="ctr"/>
+            <a:r>
+              <a:rPr sz="1050" b="1">
+                <a:solidFill>
+                  <a:srgbClr val="262626"/>
+                </a:solidFill>
+                <a:latin typeface="Meiryo"/>
+                <a:ea typeface="Meiryo"/>
+              </a:rPr>
+              <a:t>利用者（複数・マルチテナント）</a:t>
+            </a:r>
+          </a:p>
+        </p:txBody>
+      </p:sp>
+      <p:sp>
+        <p:nvSpPr>
+          <p:cNvPr id="12" name="TextBox 11"/>
+          <p:cNvSpPr txBox="1"/>
+          <p:nvPr/>
+        </p:nvSpPr>
+        <p:spPr>
+          <a:xfrm>
+            <a:off x="137160" y="4553712"/>
+            <a:ext cx="11155680" cy="292608"/>
+          </a:xfrm>
+          <a:prstGeom prst="rect">
+            <a:avLst/>
+          </a:prstGeom>
+          <a:noFill/>
+        </p:spPr>
+        <p:txBody>
+          <a:bodyPr wrap="square">
+            <a:spAutoFit/>
+          </a:bodyPr>
+          <a:lstStyle/>
+          <a:p>
+            <a:pPr algn="ctr"/>
+            <a:r>
+              <a:rPr sz="1200" b="1">
+                <a:solidFill>
+                  <a:srgbClr val="262626"/>
+                </a:solidFill>
+                <a:latin typeface="Meiryo"/>
+                <a:ea typeface="Meiryo"/>
+              </a:rPr>
+              <a:t>横断的関心事（品質・運用・セキュリティを担保）</a:t>
+            </a:r>
+          </a:p>
+        </p:txBody>
+      </p:sp>
+      <p:sp>
+        <p:nvSpPr>
+          <p:cNvPr id="13" name="Rounded Rectangle 12"/>
+          <p:cNvSpPr/>
+          <p:nvPr/>
+        </p:nvSpPr>
+        <p:spPr>
+          <a:xfrm>
+            <a:off x="137160" y="4864608"/>
+            <a:ext cx="2743200" cy="914400"/>
+          </a:xfrm>
+          <a:prstGeom prst="roundRect">
+            <a:avLst/>
+          </a:prstGeom>
+          <a:solidFill>
+            <a:srgbClr val="F2F2F2"/>
+          </a:solidFill>
+          <a:ln w="15875">
+            <a:solidFill>
+              <a:srgbClr val="7F7F7F"/>
+            </a:solidFill>
+          </a:ln>
+          <a:effectLst/>
+        </p:spPr>
+        <p:style>
+          <a:lnRef idx="1">
+            <a:schemeClr val="accent1"/>
+          </a:lnRef>
+          <a:fillRef idx="3">
+            <a:schemeClr val="accent1"/>
+          </a:fillRef>
+          <a:effectRef idx="2">
+            <a:schemeClr val="accent1"/>
+          </a:effectRef>
+          <a:fontRef idx="minor">
+            <a:schemeClr val="lt1"/>
+          </a:fontRef>
+        </p:style>
+        <p:txBody>
+          <a:bodyPr rtlCol="0" anchor="ctr" wrap="square" tIns="38100" bIns="38100"/>
+          <a:lstStyle/>
+          <a:p>
+            <a:pPr algn="ctr"/>
+            <a:r>
+              <a:rPr sz="1100" b="1">
+                <a:solidFill>
+                  <a:srgbClr val="262626"/>
+                </a:solidFill>
+                <a:latin typeface="Meiryo"/>
+                <a:ea typeface="Meiryo"/>
+              </a:rPr>
+              <a:t>シークレット管理</a:t>
+            </a:r>
+          </a:p>
+          <a:p>
+            <a:pPr algn="ctr"/>
+            <a:r>
+              <a:rPr sz="950" b="0">
+                <a:solidFill>
+                  <a:srgbClr val="262626"/>
+                </a:solidFill>
+                <a:latin typeface="Meiryo"/>
+                <a:ea typeface="Meiryo"/>
+              </a:rPr>
+              <a:t>自動ローテーション</a:t>
+            </a:r>
+          </a:p>
+        </p:txBody>
+      </p:sp>
+      <p:sp>
+        <p:nvSpPr>
+          <p:cNvPr id="14" name="Rounded Rectangle 13"/>
+          <p:cNvSpPr/>
+          <p:nvPr/>
+        </p:nvSpPr>
+        <p:spPr>
+          <a:xfrm>
+            <a:off x="3017520" y="4864608"/>
+            <a:ext cx="2743200" cy="914400"/>
+          </a:xfrm>
+          <a:prstGeom prst="roundRect">
+            <a:avLst/>
+          </a:prstGeom>
+          <a:solidFill>
+            <a:srgbClr val="F2F2F2"/>
+          </a:solidFill>
+          <a:ln w="15875">
+            <a:solidFill>
+              <a:srgbClr val="7F7F7F"/>
+            </a:solidFill>
+          </a:ln>
+          <a:effectLst/>
+        </p:spPr>
+        <p:style>
+          <a:lnRef idx="1">
+            <a:schemeClr val="accent1"/>
+          </a:lnRef>
+          <a:fillRef idx="3">
+            <a:schemeClr val="accent1"/>
+          </a:fillRef>
+          <a:effectRef idx="2">
+            <a:schemeClr val="accent1"/>
+          </a:effectRef>
+          <a:fontRef idx="minor">
+            <a:schemeClr val="lt1"/>
+          </a:fontRef>
+        </p:style>
+        <p:txBody>
+          <a:bodyPr rtlCol="0" anchor="ctr" wrap="square" tIns="38100" bIns="38100"/>
+          <a:lstStyle/>
+          <a:p>
+            <a:pPr algn="ctr"/>
+            <a:r>
+              <a:rPr sz="1100" b="1">
+                <a:solidFill>
+                  <a:srgbClr val="262626"/>
+                </a:solidFill>
+                <a:latin typeface="Meiryo"/>
+                <a:ea typeface="Meiryo"/>
+              </a:rPr>
+              <a:t>監視・アラート・ログ</a:t>
+            </a:r>
+          </a:p>
+          <a:p>
+            <a:pPr algn="ctr"/>
+            <a:r>
+              <a:rPr sz="950" b="0">
+                <a:solidFill>
+                  <a:srgbClr val="262626"/>
+                </a:solidFill>
+                <a:latin typeface="Meiryo"/>
+                <a:ea typeface="Meiryo"/>
+              </a:rPr>
+              <a:t>障害検知 → 即時通知</a:t>
+            </a:r>
+          </a:p>
+        </p:txBody>
+      </p:sp>
+      <p:sp>
+        <p:nvSpPr>
+          <p:cNvPr id="15" name="Rounded Rectangle 14"/>
+          <p:cNvSpPr/>
+          <p:nvPr/>
+        </p:nvSpPr>
+        <p:spPr>
+          <a:xfrm>
+            <a:off x="5897880" y="4864608"/>
+            <a:ext cx="2743200" cy="914400"/>
+          </a:xfrm>
+          <a:prstGeom prst="roundRect">
+            <a:avLst/>
+          </a:prstGeom>
+          <a:solidFill>
+            <a:srgbClr val="F2F2F2"/>
+          </a:solidFill>
+          <a:ln w="15875">
+            <a:solidFill>
+              <a:srgbClr val="7F7F7F"/>
+            </a:solidFill>
+          </a:ln>
+          <a:effectLst/>
+        </p:spPr>
+        <p:style>
+          <a:lnRef idx="1">
+            <a:schemeClr val="accent1"/>
+          </a:lnRef>
+          <a:fillRef idx="3">
+            <a:schemeClr val="accent1"/>
+          </a:fillRef>
+          <a:effectRef idx="2">
+            <a:schemeClr val="accent1"/>
+          </a:effectRef>
+          <a:fontRef idx="minor">
+            <a:schemeClr val="lt1"/>
+          </a:fontRef>
+        </p:style>
+        <p:txBody>
+          <a:bodyPr rtlCol="0" anchor="ctr" wrap="square" tIns="38100" bIns="38100"/>
+          <a:lstStyle/>
+          <a:p>
+            <a:pPr algn="ctr"/>
+            <a:r>
+              <a:rPr sz="1100" b="1">
+                <a:solidFill>
+                  <a:srgbClr val="262626"/>
+                </a:solidFill>
+                <a:latin typeface="Meiryo"/>
+                <a:ea typeface="Meiryo"/>
+              </a:rPr>
+              <a:t>CI/CD + IaC</a:t>
+            </a:r>
+          </a:p>
+          <a:p>
+            <a:pPr algn="ctr"/>
+            <a:r>
+              <a:rPr sz="950" b="0">
+                <a:solidFill>
+                  <a:srgbClr val="262626"/>
+                </a:solidFill>
+                <a:latin typeface="Meiryo"/>
+                <a:ea typeface="Meiryo"/>
+              </a:rPr>
+              <a:t>自動デプロイ / stg・prod</a:t>
+            </a:r>
+          </a:p>
+        </p:txBody>
+      </p:sp>
+      <p:sp>
+        <p:nvSpPr>
+          <p:cNvPr id="16" name="Rounded Rectangle 15"/>
+          <p:cNvSpPr/>
+          <p:nvPr/>
+        </p:nvSpPr>
+        <p:spPr>
+          <a:xfrm>
+            <a:off x="8778240" y="4864608"/>
+            <a:ext cx="2514600" cy="914400"/>
+          </a:xfrm>
+          <a:prstGeom prst="roundRect">
+            <a:avLst/>
+          </a:prstGeom>
+          <a:solidFill>
+            <a:srgbClr val="F2F2F2"/>
+          </a:solidFill>
+          <a:ln w="15875">
+            <a:solidFill>
+              <a:srgbClr val="7F7F7F"/>
+            </a:solidFill>
+          </a:ln>
+          <a:effectLst/>
+        </p:spPr>
+        <p:style>
+          <a:lnRef idx="1">
+            <a:schemeClr val="accent1"/>
+          </a:lnRef>
+          <a:fillRef idx="3">
+            <a:schemeClr val="accent1"/>
+          </a:fillRef>
+          <a:effectRef idx="2">
+            <a:schemeClr val="accent1"/>
+          </a:effectRef>
+          <a:fontRef idx="minor">
+            <a:schemeClr val="lt1"/>
+          </a:fontRef>
+        </p:style>
+        <p:txBody>
+          <a:bodyPr rtlCol="0" anchor="ctr" wrap="square" tIns="38100" bIns="38100"/>
+          <a:lstStyle/>
+          <a:p>
+            <a:pPr algn="ctr"/>
+            <a:r>
+              <a:rPr sz="1100" b="1">
+                <a:solidFill>
+                  <a:srgbClr val="262626"/>
+                </a:solidFill>
+                <a:latin typeface="Meiryo"/>
+                <a:ea typeface="Meiryo"/>
+              </a:rPr>
+              <a:t>セキュリティ</a:t>
+            </a:r>
+          </a:p>
+          <a:p>
+            <a:pPr algn="ctr"/>
+            <a:r>
+              <a:rPr sz="950" b="0">
+                <a:solidFill>
+                  <a:srgbClr val="262626"/>
+                </a:solidFill>
+                <a:latin typeface="Meiryo"/>
+                <a:ea typeface="Meiryo"/>
+              </a:rPr>
+              <a:t>WAF・最小権限IAM</a:t>
+            </a:r>
+          </a:p>
+        </p:txBody>
+      </p:sp>
+      <p:cxnSp>
+        <p:nvCxnSpPr>
+          <p:cNvPr id="17" name="Connector 16"/>
+          <p:cNvCxnSpPr/>
+          <p:nvPr/>
+        </p:nvCxnSpPr>
+        <p:spPr>
+          <a:xfrm>
+            <a:off x="2148840" y="1737360"/>
+            <a:ext cx="182880" cy="0"/>
+          </a:xfrm>
+          <a:prstGeom prst="line">
+            <a:avLst/>
+          </a:prstGeom>
+          <a:ln w="22225">
+            <a:solidFill>
+              <a:srgbClr val="404040"/>
+            </a:solidFill>
+            <a:tailEnd type="triangle" w="med" len="med"/>
+          </a:ln>
+        </p:spPr>
+        <p:style>
+          <a:lnRef idx="2">
+            <a:schemeClr val="accent1"/>
+          </a:lnRef>
+          <a:fillRef idx="0">
+            <a:schemeClr val="accent1"/>
+          </a:fillRef>
+          <a:effectRef idx="1">
+            <a:schemeClr val="accent1"/>
+          </a:effectRef>
+          <a:fontRef idx="minor">
+            <a:schemeClr val="tx1"/>
+          </a:fontRef>
+        </p:style>
+      </p:cxnSp>
+      <p:cxnSp>
+        <p:nvCxnSpPr>
+          <p:cNvPr id="18" name="Connector 17"/>
+          <p:cNvCxnSpPr/>
+          <p:nvPr/>
+        </p:nvCxnSpPr>
+        <p:spPr>
+          <a:xfrm>
+            <a:off x="4160520" y="1737360"/>
+            <a:ext cx="182880" cy="0"/>
+          </a:xfrm>
+          <a:prstGeom prst="line">
+            <a:avLst/>
+          </a:prstGeom>
+          <a:ln w="22225">
+            <a:solidFill>
+              <a:srgbClr val="404040"/>
+            </a:solidFill>
+            <a:tailEnd type="triangle" w="med" len="med"/>
+          </a:ln>
+        </p:spPr>
+        <p:style>
+          <a:lnRef idx="2">
+            <a:schemeClr val="accent1"/>
+          </a:lnRef>
+          <a:fillRef idx="0">
+            <a:schemeClr val="accent1"/>
+          </a:fillRef>
+          <a:effectRef idx="1">
+            <a:schemeClr val="accent1"/>
+          </a:effectRef>
+          <a:fontRef idx="minor">
+            <a:schemeClr val="tx1"/>
+          </a:fontRef>
+        </p:style>
+      </p:cxnSp>
+      <p:cxnSp>
+        <p:nvCxnSpPr>
+          <p:cNvPr id="19" name="Connector 18"/>
+          <p:cNvCxnSpPr/>
+          <p:nvPr/>
+        </p:nvCxnSpPr>
+        <p:spPr>
+          <a:xfrm>
+            <a:off x="6537960" y="1737360"/>
+            <a:ext cx="182880" cy="0"/>
+          </a:xfrm>
+          <a:prstGeom prst="line">
+            <a:avLst/>
+          </a:prstGeom>
+          <a:ln w="22225">
+            <a:solidFill>
+              <a:srgbClr val="404040"/>
+            </a:solidFill>
+            <a:tailEnd type="triangle" w="med" len="med"/>
+          </a:ln>
+        </p:spPr>
+        <p:style>
+          <a:lnRef idx="2">
+            <a:schemeClr val="accent1"/>
+          </a:lnRef>
+          <a:fillRef idx="0">
+            <a:schemeClr val="accent1"/>
+          </a:fillRef>
+          <a:effectRef idx="1">
+            <a:schemeClr val="accent1"/>
+          </a:effectRef>
+          <a:fontRef idx="minor">
+            <a:schemeClr val="tx1"/>
+          </a:fontRef>
+        </p:style>
+      </p:cxnSp>
+      <p:cxnSp>
+        <p:nvCxnSpPr>
+          <p:cNvPr id="20" name="Connector 19"/>
+          <p:cNvCxnSpPr/>
+          <p:nvPr/>
+        </p:nvCxnSpPr>
+        <p:spPr>
+          <a:xfrm>
+            <a:off x="8915400" y="1737360"/>
+            <a:ext cx="182880" cy="0"/>
+          </a:xfrm>
+          <a:prstGeom prst="line">
+            <a:avLst/>
+          </a:prstGeom>
+          <a:ln w="22225">
+            <a:solidFill>
+              <a:srgbClr val="404040"/>
+            </a:solidFill>
+            <a:tailEnd type="triangle" w="med" len="med"/>
+          </a:ln>
+        </p:spPr>
+        <p:style>
+          <a:lnRef idx="2">
+            <a:schemeClr val="accent1"/>
+          </a:lnRef>
+          <a:fillRef idx="0">
+            <a:schemeClr val="accent1"/>
+          </a:fillRef>
+          <a:effectRef idx="1">
+            <a:schemeClr val="accent1"/>
+          </a:effectRef>
+          <a:fontRef idx="minor">
+            <a:schemeClr val="tx1"/>
+          </a:fontRef>
+        </p:style>
+      </p:cxnSp>
+      <p:cxnSp>
+        <p:nvCxnSpPr>
+          <p:cNvPr id="21" name="Connector 20"/>
+          <p:cNvCxnSpPr/>
+          <p:nvPr/>
+        </p:nvCxnSpPr>
+        <p:spPr>
+          <a:xfrm>
+            <a:off x="5440680" y="2286000"/>
+            <a:ext cx="0" cy="548640"/>
+          </a:xfrm>
+          <a:prstGeom prst="line">
+            <a:avLst/>
+          </a:prstGeom>
+          <a:ln w="22225">
+            <a:solidFill>
+              <a:srgbClr val="404040"/>
+            </a:solidFill>
+            <a:tailEnd type="triangle" w="med" len="med"/>
+          </a:ln>
+        </p:spPr>
+        <p:style>
+          <a:lnRef idx="2">
+            <a:schemeClr val="accent1"/>
+          </a:lnRef>
+          <a:fillRef idx="0">
+            <a:schemeClr val="accent1"/>
+          </a:fillRef>
+          <a:effectRef idx="1">
+            <a:schemeClr val="accent1"/>
+          </a:effectRef>
+          <a:fontRef idx="minor">
+            <a:schemeClr val="tx1"/>
+          </a:fontRef>
+        </p:style>
+      </p:cxnSp>
+      <p:cxnSp>
+        <p:nvCxnSpPr>
+          <p:cNvPr id="22" name="Connector 21"/>
+          <p:cNvCxnSpPr/>
+          <p:nvPr/>
+        </p:nvCxnSpPr>
+        <p:spPr>
+          <a:xfrm>
+            <a:off x="6035040" y="2286000"/>
+            <a:ext cx="1097280" cy="548640"/>
+          </a:xfrm>
+          <a:prstGeom prst="line">
+            <a:avLst/>
+          </a:prstGeom>
+          <a:ln w="22225">
+            <a:solidFill>
+              <a:srgbClr val="404040"/>
+            </a:solidFill>
+            <a:tailEnd type="triangle" w="med" len="med"/>
+          </a:ln>
+        </p:spPr>
+        <p:style>
+          <a:lnRef idx="2">
+            <a:schemeClr val="accent1"/>
+          </a:lnRef>
+          <a:fillRef idx="0">
+            <a:schemeClr val="accent1"/>
+          </a:fillRef>
+          <a:effectRef idx="1">
+            <a:schemeClr val="accent1"/>
+          </a:effectRef>
+          <a:fontRef idx="minor">
+            <a:schemeClr val="tx1"/>
+          </a:fontRef>
+        </p:style>
+      </p:cxnSp>
+      <p:cxnSp>
+        <p:nvCxnSpPr>
+          <p:cNvPr id="23" name="Connector 22"/>
+          <p:cNvCxnSpPr/>
+          <p:nvPr/>
+        </p:nvCxnSpPr>
+        <p:spPr>
+          <a:xfrm>
+            <a:off x="10195560" y="2286000"/>
+            <a:ext cx="0" cy="548640"/>
+          </a:xfrm>
+          <a:prstGeom prst="line">
+            <a:avLst/>
+          </a:prstGeom>
+          <a:ln w="22225">
+            <a:solidFill>
+              <a:srgbClr val="404040"/>
+            </a:solidFill>
+            <a:tailEnd type="triangle" w="med" len="med"/>
+          </a:ln>
+        </p:spPr>
+        <p:style>
+          <a:lnRef idx="2">
+            <a:schemeClr val="accent1"/>
+          </a:lnRef>
+          <a:fillRef idx="0">
+            <a:schemeClr val="accent1"/>
+          </a:fillRef>
+          <a:effectRef idx="1">
+            <a:schemeClr val="accent1"/>
+          </a:effectRef>
+          <a:fontRef idx="minor">
+            <a:schemeClr val="tx1"/>
+          </a:fontRef>
+        </p:style>
+      </p:cxnSp>
+      <p:cxnSp>
+        <p:nvCxnSpPr>
+          <p:cNvPr id="24" name="Connector 23"/>
+          <p:cNvCxnSpPr/>
+          <p:nvPr/>
+        </p:nvCxnSpPr>
+        <p:spPr>
+          <a:xfrm>
+            <a:off x="10195560" y="3749039"/>
+            <a:ext cx="0" cy="182881"/>
+          </a:xfrm>
+          <a:prstGeom prst="line">
+            <a:avLst/>
+          </a:prstGeom>
+          <a:ln w="22225">
+            <a:solidFill>
+              <a:srgbClr val="404040"/>
+            </a:solidFill>
+            <a:tailEnd type="triangle" w="med" len="med"/>
+          </a:ln>
+        </p:spPr>
+        <p:style>
+          <a:lnRef idx="2">
+            <a:schemeClr val="accent1"/>
+          </a:lnRef>
+          <a:fillRef idx="0">
+            <a:schemeClr val="accent1"/>
+          </a:fillRef>
+          <a:effectRef idx="1">
+            <a:schemeClr val="accent1"/>
+          </a:effectRef>
+          <a:fontRef idx="minor">
+            <a:schemeClr val="tx1"/>
+          </a:fontRef>
+        </p:style>
+      </p:cxnSp>
+      <p:sp>
+        <p:nvSpPr>
+          <p:cNvPr id="25" name="TextBox 24"/>
+          <p:cNvSpPr txBox="1"/>
+          <p:nvPr/>
+        </p:nvSpPr>
+        <p:spPr>
+          <a:xfrm>
+            <a:off x="274320" y="5989320"/>
+            <a:ext cx="11612880" cy="640080"/>
+          </a:xfrm>
+          <a:prstGeom prst="rect">
+            <a:avLst/>
+          </a:prstGeom>
+          <a:noFill/>
+        </p:spPr>
+        <p:txBody>
+          <a:bodyPr wrap="square">
+            <a:spAutoFit/>
+          </a:bodyPr>
+          <a:lstStyle/>
+          <a:p>
+            <a:pPr algn="ctr"/>
+            <a:r>
+              <a:rPr sz="950" b="0">
+                <a:solidFill>
+                  <a:srgbClr val="595959"/>
+                </a:solidFill>
+                <a:latin typeface="Meiryo"/>
+                <a:ea typeface="Meiryo"/>
+              </a:rPr>
+              <a:t>※ 無料枠の制限（レート/通数上限・時刻保証なし・状態を持てない）を解消。SLA・再試行/DLQ・監視・データ永続化・マルチチャネルで品質を担保。
+例) AWS: EventBridge Scheduler / SQS / Lambda / DynamoDB / Secrets Manager / CloudWatch ・ GCP: Cloud Scheduler / Pub-Sub / Cloud Run / Firestore / Secret Manager / Cloud Monitoring</a:t>
             </a:r>
           </a:p>
         </p:txBody>

--- a/docs/システム構成図.pptx
+++ b/docs/システム構成図.pptx
@@ -4554,8 +4554,8 @@
         </p:nvSpPr>
         <p:spPr>
           <a:xfrm>
-            <a:off x="274320" y="109728"/>
-            <a:ext cx="11612880" cy="502920"/>
+            <a:off x="274320" y="91440"/>
+            <a:ext cx="11612880" cy="457200"/>
           </a:xfrm>
           <a:prstGeom prst="rect">
             <a:avLst/>
@@ -4590,8 +4590,8 @@
         </p:nvSpPr>
         <p:spPr>
           <a:xfrm>
-            <a:off x="137160" y="1188720"/>
-            <a:ext cx="2011680" cy="1097280"/>
+            <a:off x="137160" y="868680"/>
+            <a:ext cx="2011680" cy="1234440"/>
           </a:xfrm>
           <a:prstGeom prst="roundRect">
             <a:avLst/>
@@ -4626,33 +4626,20 @@
           <a:p>
             <a:pPr algn="ctr"/>
             <a:r>
-              <a:rPr sz="1100" b="1">
-                <a:solidFill>
-                  <a:srgbClr val="262626"/>
-                </a:solidFill>
-                <a:latin typeface="Meiryo"/>
-                <a:ea typeface="Meiryo"/>
-              </a:rPr>
-              <a:t>マネージド</a:t>
-            </a:r>
-          </a:p>
-          <a:p>
-            <a:pPr algn="ctr"/>
-            <a:r>
-              <a:rPr sz="950" b="0">
-                <a:solidFill>
-                  <a:srgbClr val="262626"/>
-                </a:solidFill>
-                <a:latin typeface="Meiryo"/>
-                <a:ea typeface="Meiryo"/>
-              </a:rPr>
-              <a:t>スケジューラ</a:t>
-            </a:r>
-          </a:p>
-          <a:p>
-            <a:pPr algn="ctr"/>
-            <a:r>
-              <a:rPr sz="950" b="0">
+              <a:rPr sz="1050" b="1">
+                <a:solidFill>
+                  <a:srgbClr val="262626"/>
+                </a:solidFill>
+                <a:latin typeface="Meiryo"/>
+                <a:ea typeface="Meiryo"/>
+              </a:rPr>
+              <a:t>マネージドスケジューラ</a:t>
+            </a:r>
+          </a:p>
+          <a:p>
+            <a:pPr algn="ctr"/>
+            <a:r>
+              <a:rPr sz="900" b="0">
                 <a:solidFill>
                   <a:srgbClr val="262626"/>
                 </a:solidFill>
@@ -4660,6 +4647,32 @@
                 <a:ea typeface="Meiryo"/>
               </a:rPr>
               <a:t>SLA保証・定時起動</a:t>
+            </a:r>
+          </a:p>
+          <a:p>
+            <a:pPr algn="ctr"/>
+            <a:r>
+              <a:rPr sz="900" b="0">
+                <a:solidFill>
+                  <a:srgbClr val="262626"/>
+                </a:solidFill>
+                <a:latin typeface="Meiryo"/>
+                <a:ea typeface="Meiryo"/>
+              </a:rPr>
+              <a:t>例: EventBridge Scheduler /</a:t>
+            </a:r>
+          </a:p>
+          <a:p>
+            <a:pPr algn="ctr"/>
+            <a:r>
+              <a:rPr sz="900" b="0">
+                <a:solidFill>
+                  <a:srgbClr val="262626"/>
+                </a:solidFill>
+                <a:latin typeface="Meiryo"/>
+                <a:ea typeface="Meiryo"/>
+              </a:rPr>
+              <a:t>Cloud Scheduler</a:t>
             </a:r>
           </a:p>
         </p:txBody>
@@ -4672,8 +4685,8 @@
         </p:nvSpPr>
         <p:spPr>
           <a:xfrm>
-            <a:off x="2331720" y="1188720"/>
-            <a:ext cx="1828800" cy="1097280"/>
+            <a:off x="2331720" y="868680"/>
+            <a:ext cx="1828800" cy="1234440"/>
           </a:xfrm>
           <a:prstGeom prst="roundRect">
             <a:avLst/>
@@ -4708,7 +4721,7 @@
           <a:p>
             <a:pPr algn="ctr"/>
             <a:r>
-              <a:rPr sz="1100" b="1">
+              <a:rPr sz="1050" b="1">
                 <a:solidFill>
                   <a:srgbClr val="262626"/>
                 </a:solidFill>
@@ -4721,27 +4734,40 @@
           <a:p>
             <a:pPr algn="ctr"/>
             <a:r>
-              <a:rPr sz="950" b="0">
-                <a:solidFill>
-                  <a:srgbClr val="262626"/>
-                </a:solidFill>
-                <a:latin typeface="Meiryo"/>
-                <a:ea typeface="Meiryo"/>
-              </a:rPr>
-              <a:t>疎結合・再試行</a:t>
-            </a:r>
-          </a:p>
-          <a:p>
-            <a:pPr algn="ctr"/>
-            <a:r>
-              <a:rPr sz="950" b="0">
-                <a:solidFill>
-                  <a:srgbClr val="262626"/>
-                </a:solidFill>
-                <a:latin typeface="Meiryo"/>
-                <a:ea typeface="Meiryo"/>
-              </a:rPr>
-              <a:t>デッドレター</a:t>
+              <a:rPr sz="900" b="0">
+                <a:solidFill>
+                  <a:srgbClr val="262626"/>
+                </a:solidFill>
+                <a:latin typeface="Meiryo"/>
+                <a:ea typeface="Meiryo"/>
+              </a:rPr>
+              <a:t>疎結合・再試行・DLQ</a:t>
+            </a:r>
+          </a:p>
+          <a:p>
+            <a:pPr algn="ctr"/>
+            <a:r>
+              <a:rPr sz="900" b="0">
+                <a:solidFill>
+                  <a:srgbClr val="262626"/>
+                </a:solidFill>
+                <a:latin typeface="Meiryo"/>
+                <a:ea typeface="Meiryo"/>
+              </a:rPr>
+              <a:t>例: SQS / Pub-Sub /</a:t>
+            </a:r>
+          </a:p>
+          <a:p>
+            <a:pPr algn="ctr"/>
+            <a:r>
+              <a:rPr sz="900" b="0">
+                <a:solidFill>
+                  <a:srgbClr val="262626"/>
+                </a:solidFill>
+                <a:latin typeface="Meiryo"/>
+                <a:ea typeface="Meiryo"/>
+              </a:rPr>
+              <a:t>Service Bus</a:t>
             </a:r>
           </a:p>
         </p:txBody>
@@ -4754,8 +4780,8 @@
         </p:nvSpPr>
         <p:spPr>
           <a:xfrm>
-            <a:off x="4343400" y="1188720"/>
-            <a:ext cx="2194560" cy="1097280"/>
+            <a:off x="4343400" y="868680"/>
+            <a:ext cx="2194560" cy="1234440"/>
           </a:xfrm>
           <a:prstGeom prst="roundRect">
             <a:avLst/>
@@ -4790,7 +4816,7 @@
           <a:p>
             <a:pPr algn="ctr"/>
             <a:r>
-              <a:rPr sz="1100" b="1">
+              <a:rPr sz="1050" b="1">
                 <a:solidFill>
                   <a:srgbClr val="262626"/>
                 </a:solidFill>
@@ -4803,27 +4829,40 @@
           <a:p>
             <a:pPr algn="ctr"/>
             <a:r>
-              <a:rPr sz="950" b="0">
-                <a:solidFill>
-                  <a:srgbClr val="262626"/>
-                </a:solidFill>
-                <a:latin typeface="Meiryo"/>
-                <a:ea typeface="Meiryo"/>
-              </a:rPr>
-              <a:t>（オーケストレーション）</a:t>
-            </a:r>
-          </a:p>
-          <a:p>
-            <a:pPr algn="ctr"/>
-            <a:r>
-              <a:rPr sz="950" b="0">
-                <a:solidFill>
-                  <a:srgbClr val="262626"/>
-                </a:solidFill>
-                <a:latin typeface="Meiryo"/>
-                <a:ea typeface="Meiryo"/>
-              </a:rPr>
-              <a:t>オートスケール</a:t>
+              <a:rPr sz="900" b="0">
+                <a:solidFill>
+                  <a:srgbClr val="262626"/>
+                </a:solidFill>
+                <a:latin typeface="Meiryo"/>
+                <a:ea typeface="Meiryo"/>
+              </a:rPr>
+              <a:t>オートスケール・実行管理</a:t>
+            </a:r>
+          </a:p>
+          <a:p>
+            <a:pPr algn="ctr"/>
+            <a:r>
+              <a:rPr sz="900" b="0">
+                <a:solidFill>
+                  <a:srgbClr val="262626"/>
+                </a:solidFill>
+                <a:latin typeface="Meiryo"/>
+                <a:ea typeface="Meiryo"/>
+              </a:rPr>
+              <a:t>例: Lambda / Cloud Run /</a:t>
+            </a:r>
+          </a:p>
+          <a:p>
+            <a:pPr algn="ctr"/>
+            <a:r>
+              <a:rPr sz="900" b="0">
+                <a:solidFill>
+                  <a:srgbClr val="262626"/>
+                </a:solidFill>
+                <a:latin typeface="Meiryo"/>
+                <a:ea typeface="Meiryo"/>
+              </a:rPr>
+              <a:t>Step Functions</a:t>
             </a:r>
           </a:p>
         </p:txBody>
@@ -4836,8 +4875,8 @@
         </p:nvSpPr>
         <p:spPr>
           <a:xfrm>
-            <a:off x="6720840" y="1188720"/>
-            <a:ext cx="2194560" cy="1097280"/>
+            <a:off x="6720840" y="868680"/>
+            <a:ext cx="2194560" cy="1234440"/>
           </a:xfrm>
           <a:prstGeom prst="roundRect">
             <a:avLst/>
@@ -4872,7 +4911,7 @@
           <a:p>
             <a:pPr algn="ctr"/>
             <a:r>
-              <a:rPr sz="1100" b="1">
+              <a:rPr sz="1050" b="1">
                 <a:solidFill>
                   <a:srgbClr val="262626"/>
                 </a:solidFill>
@@ -4885,27 +4924,40 @@
           <a:p>
             <a:pPr algn="ctr"/>
             <a:r>
-              <a:rPr sz="950" b="0">
-                <a:solidFill>
-                  <a:srgbClr val="262626"/>
-                </a:solidFill>
-                <a:latin typeface="Meiryo"/>
-                <a:ea typeface="Meiryo"/>
-              </a:rPr>
-              <a:t>高レート上限</a:t>
-            </a:r>
-          </a:p>
-          <a:p>
-            <a:pPr algn="ctr"/>
-            <a:r>
-              <a:rPr sz="950" b="0">
-                <a:solidFill>
-                  <a:srgbClr val="262626"/>
-                </a:solidFill>
-                <a:latin typeface="Meiryo"/>
-                <a:ea typeface="Meiryo"/>
-              </a:rPr>
-              <a:t>フォールバック</a:t>
+              <a:rPr sz="900" b="0">
+                <a:solidFill>
+                  <a:srgbClr val="262626"/>
+                </a:solidFill>
+                <a:latin typeface="Meiryo"/>
+                <a:ea typeface="Meiryo"/>
+              </a:rPr>
+              <a:t>高レート上限・フォールバック</a:t>
+            </a:r>
+          </a:p>
+          <a:p>
+            <a:pPr algn="ctr"/>
+            <a:r>
+              <a:rPr sz="900" b="0">
+                <a:solidFill>
+                  <a:srgbClr val="262626"/>
+                </a:solidFill>
+                <a:latin typeface="Meiryo"/>
+                <a:ea typeface="Meiryo"/>
+              </a:rPr>
+              <a:t>例: Claude API / OpenAI /</a:t>
+            </a:r>
+          </a:p>
+          <a:p>
+            <a:pPr algn="ctr"/>
+            <a:r>
+              <a:rPr sz="900" b="0">
+                <a:solidFill>
+                  <a:srgbClr val="262626"/>
+                </a:solidFill>
+                <a:latin typeface="Meiryo"/>
+                <a:ea typeface="Meiryo"/>
+              </a:rPr>
+              <a:t>Gemini / Groq(有料)</a:t>
             </a:r>
           </a:p>
         </p:txBody>
@@ -4918,8 +4970,8 @@
         </p:nvSpPr>
         <p:spPr>
           <a:xfrm>
-            <a:off x="9098280" y="1188720"/>
-            <a:ext cx="2194560" cy="1097280"/>
+            <a:off x="9098280" y="868680"/>
+            <a:ext cx="2194560" cy="1234440"/>
           </a:xfrm>
           <a:prstGeom prst="roundRect">
             <a:avLst/>
@@ -4954,7 +5006,7 @@
           <a:p>
             <a:pPr algn="ctr"/>
             <a:r>
-              <a:rPr sz="1100" b="1">
+              <a:rPr sz="1050" b="1">
                 <a:solidFill>
                   <a:srgbClr val="262626"/>
                 </a:solidFill>
@@ -4967,27 +5019,40 @@
           <a:p>
             <a:pPr algn="ctr"/>
             <a:r>
-              <a:rPr sz="950" b="0">
-                <a:solidFill>
-                  <a:srgbClr val="262626"/>
-                </a:solidFill>
-                <a:latin typeface="Meiryo"/>
-                <a:ea typeface="Meiryo"/>
-              </a:rPr>
-              <a:t>配信キュー</a:t>
-            </a:r>
-          </a:p>
-          <a:p>
-            <a:pPr algn="ctr"/>
-            <a:r>
-              <a:rPr sz="950" b="0">
-                <a:solidFill>
-                  <a:srgbClr val="262626"/>
-                </a:solidFill>
-                <a:latin typeface="Meiryo"/>
-                <a:ea typeface="Meiryo"/>
-              </a:rPr>
-              <a:t>レート制御・再試行</a:t>
+              <a:rPr sz="900" b="0">
+                <a:solidFill>
+                  <a:srgbClr val="262626"/>
+                </a:solidFill>
+                <a:latin typeface="Meiryo"/>
+                <a:ea typeface="Meiryo"/>
+              </a:rPr>
+              <a:t>配信キュー・レート制御</a:t>
+            </a:r>
+          </a:p>
+          <a:p>
+            <a:pPr algn="ctr"/>
+            <a:r>
+              <a:rPr sz="900" b="0">
+                <a:solidFill>
+                  <a:srgbClr val="262626"/>
+                </a:solidFill>
+                <a:latin typeface="Meiryo"/>
+                <a:ea typeface="Meiryo"/>
+              </a:rPr>
+              <a:t>例: SQS+ワーカー /</a:t>
+            </a:r>
+          </a:p>
+          <a:p>
+            <a:pPr algn="ctr"/>
+            <a:r>
+              <a:rPr sz="900" b="0">
+                <a:solidFill>
+                  <a:srgbClr val="262626"/>
+                </a:solidFill>
+                <a:latin typeface="Meiryo"/>
+                <a:ea typeface="Meiryo"/>
+              </a:rPr>
+              <a:t>Cloud Tasks</a:t>
             </a:r>
           </a:p>
         </p:txBody>
@@ -5000,8 +5065,8 @@
         </p:nvSpPr>
         <p:spPr>
           <a:xfrm>
-            <a:off x="4343400" y="2834640"/>
-            <a:ext cx="2194560" cy="914400"/>
+            <a:off x="4343400" y="2377440"/>
+            <a:ext cx="2194560" cy="1188720"/>
           </a:xfrm>
           <a:prstGeom prst="roundRect">
             <a:avLst/>
@@ -5036,7 +5101,7 @@
           <a:p>
             <a:pPr algn="ctr"/>
             <a:r>
-              <a:rPr sz="1100" b="1">
+              <a:rPr sz="1000" b="1">
                 <a:solidFill>
                   <a:srgbClr val="262626"/>
                 </a:solidFill>
@@ -5049,7 +5114,7 @@
           <a:p>
             <a:pPr algn="ctr"/>
             <a:r>
-              <a:rPr sz="950" b="0">
+              <a:rPr sz="850" b="0">
                 <a:solidFill>
                   <a:srgbClr val="262626"/>
                 </a:solidFill>
@@ -5057,6 +5122,32 @@
                 <a:ea typeface="Meiryo"/>
               </a:rPr>
               <a:t>RSS + 本文全文取得</a:t>
+            </a:r>
+          </a:p>
+          <a:p>
+            <a:pPr algn="ctr"/>
+            <a:r>
+              <a:rPr sz="850" b="0">
+                <a:solidFill>
+                  <a:srgbClr val="262626"/>
+                </a:solidFill>
+                <a:latin typeface="Meiryo"/>
+                <a:ea typeface="Meiryo"/>
+              </a:rPr>
+              <a:t>例: Firecrawl / Diffbot /</a:t>
+            </a:r>
+          </a:p>
+          <a:p>
+            <a:pPr algn="ctr"/>
+            <a:r>
+              <a:rPr sz="850" b="0">
+                <a:solidFill>
+                  <a:srgbClr val="262626"/>
+                </a:solidFill>
+                <a:latin typeface="Meiryo"/>
+                <a:ea typeface="Meiryo"/>
+              </a:rPr>
+              <a:t>newspaper3k</a:t>
             </a:r>
           </a:p>
         </p:txBody>
@@ -5069,8 +5160,8 @@
         </p:nvSpPr>
         <p:spPr>
           <a:xfrm>
-            <a:off x="6720840" y="2834640"/>
-            <a:ext cx="2194560" cy="914400"/>
+            <a:off x="6720840" y="2377440"/>
+            <a:ext cx="2194560" cy="1188720"/>
           </a:xfrm>
           <a:prstGeom prst="roundRect">
             <a:avLst/>
@@ -5105,7 +5196,7 @@
           <a:p>
             <a:pPr algn="ctr"/>
             <a:r>
-              <a:rPr sz="1050" b="1">
+              <a:rPr sz="1000" b="1">
                 <a:solidFill>
                   <a:srgbClr val="262626"/>
                 </a:solidFill>
@@ -5118,14 +5209,40 @@
           <a:p>
             <a:pPr algn="ctr"/>
             <a:r>
-              <a:rPr sz="900" b="0">
-                <a:solidFill>
-                  <a:srgbClr val="262626"/>
-                </a:solidFill>
-                <a:latin typeface="Meiryo"/>
-                <a:ea typeface="Meiryo"/>
-              </a:rPr>
-              <a:t>配信履歴・重複排除・購読/設定</a:t>
+              <a:rPr sz="850" b="0">
+                <a:solidFill>
+                  <a:srgbClr val="262626"/>
+                </a:solidFill>
+                <a:latin typeface="Meiryo"/>
+                <a:ea typeface="Meiryo"/>
+              </a:rPr>
+              <a:t>履歴・重複排除・購読/設定</a:t>
+            </a:r>
+          </a:p>
+          <a:p>
+            <a:pPr algn="ctr"/>
+            <a:r>
+              <a:rPr sz="850" b="0">
+                <a:solidFill>
+                  <a:srgbClr val="262626"/>
+                </a:solidFill>
+                <a:latin typeface="Meiryo"/>
+                <a:ea typeface="Meiryo"/>
+              </a:rPr>
+              <a:t>例: DynamoDB / Firestore /</a:t>
+            </a:r>
+          </a:p>
+          <a:p>
+            <a:pPr algn="ctr"/>
+            <a:r>
+              <a:rPr sz="850" b="0">
+                <a:solidFill>
+                  <a:srgbClr val="262626"/>
+                </a:solidFill>
+                <a:latin typeface="Meiryo"/>
+                <a:ea typeface="Meiryo"/>
+              </a:rPr>
+              <a:t>Cloud SQL・RDS</a:t>
             </a:r>
           </a:p>
         </p:txBody>
@@ -5138,8 +5255,8 @@
         </p:nvSpPr>
         <p:spPr>
           <a:xfrm>
-            <a:off x="9098280" y="2834640"/>
-            <a:ext cx="2194560" cy="914400"/>
+            <a:off x="9098280" y="2377440"/>
+            <a:ext cx="2194560" cy="1188720"/>
           </a:xfrm>
           <a:prstGeom prst="roundRect">
             <a:avLst/>
@@ -5174,7 +5291,7 @@
           <a:p>
             <a:pPr algn="ctr"/>
             <a:r>
-              <a:rPr sz="1050" b="1">
+              <a:rPr sz="1000" b="1">
                 <a:solidFill>
                   <a:srgbClr val="262626"/>
                 </a:solidFill>
@@ -5187,7 +5304,7 @@
           <a:p>
             <a:pPr algn="ctr"/>
             <a:r>
-              <a:rPr sz="900" b="0">
+              <a:rPr sz="850" b="0">
                 <a:solidFill>
                   <a:srgbClr val="262626"/>
                 </a:solidFill>
@@ -5195,6 +5312,32 @@
                 <a:ea typeface="Meiryo"/>
               </a:rPr>
               <a:t>LINE有料 / Email / Web Push</a:t>
+            </a:r>
+          </a:p>
+          <a:p>
+            <a:pPr algn="ctr"/>
+            <a:r>
+              <a:rPr sz="850" b="0">
+                <a:solidFill>
+                  <a:srgbClr val="262626"/>
+                </a:solidFill>
+                <a:latin typeface="Meiryo"/>
+                <a:ea typeface="Meiryo"/>
+              </a:rPr>
+              <a:t>例: LINE / SendGrid・SES /</a:t>
+            </a:r>
+          </a:p>
+          <a:p>
+            <a:pPr algn="ctr"/>
+            <a:r>
+              <a:rPr sz="850" b="0">
+                <a:solidFill>
+                  <a:srgbClr val="262626"/>
+                </a:solidFill>
+                <a:latin typeface="Meiryo"/>
+                <a:ea typeface="Meiryo"/>
+              </a:rPr>
+              <a:t>FCM / Twilio</a:t>
             </a:r>
           </a:p>
         </p:txBody>
@@ -5207,8 +5350,8 @@
         </p:nvSpPr>
         <p:spPr>
           <a:xfrm>
-            <a:off x="9098280" y="3931920"/>
-            <a:ext cx="2194560" cy="530352"/>
+            <a:off x="9098280" y="3703320"/>
+            <a:ext cx="2194560" cy="566928"/>
           </a:xfrm>
           <a:prstGeom prst="roundRect">
             <a:avLst/>
@@ -5243,7 +5386,7 @@
           <a:p>
             <a:pPr algn="ctr"/>
             <a:r>
-              <a:rPr sz="1050" b="1">
+              <a:rPr sz="950" b="1">
                 <a:solidFill>
                   <a:srgbClr val="262626"/>
                 </a:solidFill>
@@ -5251,6 +5394,19 @@
                 <a:ea typeface="Meiryo"/>
               </a:rPr>
               <a:t>利用者（複数・マルチテナント）</a:t>
+            </a:r>
+          </a:p>
+          <a:p>
+            <a:pPr algn="ctr"/>
+            <a:r>
+              <a:rPr sz="800" b="0">
+                <a:solidFill>
+                  <a:srgbClr val="262626"/>
+                </a:solidFill>
+                <a:latin typeface="Meiryo"/>
+                <a:ea typeface="Meiryo"/>
+              </a:rPr>
+              <a:t>認証例: Cognito / Firebase Auth / Auth0</a:t>
             </a:r>
           </a:p>
         </p:txBody>
@@ -5263,8 +5419,8 @@
         </p:nvSpPr>
         <p:spPr>
           <a:xfrm>
-            <a:off x="137160" y="4553712"/>
-            <a:ext cx="11155680" cy="292608"/>
+            <a:off x="137160" y="4315968"/>
+            <a:ext cx="11155680" cy="274320"/>
           </a:xfrm>
           <a:prstGeom prst="rect">
             <a:avLst/>
@@ -5299,8 +5455,8 @@
         </p:nvSpPr>
         <p:spPr>
           <a:xfrm>
-            <a:off x="137160" y="4864608"/>
-            <a:ext cx="2743200" cy="914400"/>
+            <a:off x="137160" y="4617720"/>
+            <a:ext cx="2743200" cy="1234440"/>
           </a:xfrm>
           <a:prstGeom prst="roundRect">
             <a:avLst/>
@@ -5335,7 +5491,7 @@
           <a:p>
             <a:pPr algn="ctr"/>
             <a:r>
-              <a:rPr sz="1100" b="1">
+              <a:rPr sz="1000" b="1">
                 <a:solidFill>
                   <a:srgbClr val="262626"/>
                 </a:solidFill>
@@ -5348,7 +5504,7 @@
           <a:p>
             <a:pPr algn="ctr"/>
             <a:r>
-              <a:rPr sz="950" b="0">
+              <a:rPr sz="850" b="0">
                 <a:solidFill>
                   <a:srgbClr val="262626"/>
                 </a:solidFill>
@@ -5356,6 +5512,32 @@
                 <a:ea typeface="Meiryo"/>
               </a:rPr>
               <a:t>自動ローテーション</a:t>
+            </a:r>
+          </a:p>
+          <a:p>
+            <a:pPr algn="ctr"/>
+            <a:r>
+              <a:rPr sz="850" b="0">
+                <a:solidFill>
+                  <a:srgbClr val="262626"/>
+                </a:solidFill>
+                <a:latin typeface="Meiryo"/>
+                <a:ea typeface="Meiryo"/>
+              </a:rPr>
+              <a:t>例: Secrets Manager /</a:t>
+            </a:r>
+          </a:p>
+          <a:p>
+            <a:pPr algn="ctr"/>
+            <a:r>
+              <a:rPr sz="850" b="0">
+                <a:solidFill>
+                  <a:srgbClr val="262626"/>
+                </a:solidFill>
+                <a:latin typeface="Meiryo"/>
+                <a:ea typeface="Meiryo"/>
+              </a:rPr>
+              <a:t>Secret Manager / Vault</a:t>
             </a:r>
           </a:p>
         </p:txBody>
@@ -5368,8 +5550,8 @@
         </p:nvSpPr>
         <p:spPr>
           <a:xfrm>
-            <a:off x="3017520" y="4864608"/>
-            <a:ext cx="2743200" cy="914400"/>
+            <a:off x="3017520" y="4617720"/>
+            <a:ext cx="2743200" cy="1234440"/>
           </a:xfrm>
           <a:prstGeom prst="roundRect">
             <a:avLst/>
@@ -5404,7 +5586,7 @@
           <a:p>
             <a:pPr algn="ctr"/>
             <a:r>
-              <a:rPr sz="1100" b="1">
+              <a:rPr sz="1000" b="1">
                 <a:solidFill>
                   <a:srgbClr val="262626"/>
                 </a:solidFill>
@@ -5417,7 +5599,7 @@
           <a:p>
             <a:pPr algn="ctr"/>
             <a:r>
-              <a:rPr sz="950" b="0">
+              <a:rPr sz="850" b="0">
                 <a:solidFill>
                   <a:srgbClr val="262626"/>
                 </a:solidFill>
@@ -5425,6 +5607,32 @@
                 <a:ea typeface="Meiryo"/>
               </a:rPr>
               <a:t>障害検知 → 即時通知</a:t>
+            </a:r>
+          </a:p>
+          <a:p>
+            <a:pPr algn="ctr"/>
+            <a:r>
+              <a:rPr sz="850" b="0">
+                <a:solidFill>
+                  <a:srgbClr val="262626"/>
+                </a:solidFill>
+                <a:latin typeface="Meiryo"/>
+                <a:ea typeface="Meiryo"/>
+              </a:rPr>
+              <a:t>例: Datadog / CloudWatch /</a:t>
+            </a:r>
+          </a:p>
+          <a:p>
+            <a:pPr algn="ctr"/>
+            <a:r>
+              <a:rPr sz="850" b="0">
+                <a:solidFill>
+                  <a:srgbClr val="262626"/>
+                </a:solidFill>
+                <a:latin typeface="Meiryo"/>
+                <a:ea typeface="Meiryo"/>
+              </a:rPr>
+              <a:t>Sentry / PagerDuty</a:t>
             </a:r>
           </a:p>
         </p:txBody>
@@ -5437,8 +5645,8 @@
         </p:nvSpPr>
         <p:spPr>
           <a:xfrm>
-            <a:off x="5897880" y="4864608"/>
-            <a:ext cx="2743200" cy="914400"/>
+            <a:off x="5897880" y="4617720"/>
+            <a:ext cx="2743200" cy="1234440"/>
           </a:xfrm>
           <a:prstGeom prst="roundRect">
             <a:avLst/>
@@ -5473,7 +5681,7 @@
           <a:p>
             <a:pPr algn="ctr"/>
             <a:r>
-              <a:rPr sz="1100" b="1">
+              <a:rPr sz="1000" b="1">
                 <a:solidFill>
                   <a:srgbClr val="262626"/>
                 </a:solidFill>
@@ -5486,14 +5694,40 @@
           <a:p>
             <a:pPr algn="ctr"/>
             <a:r>
-              <a:rPr sz="950" b="0">
-                <a:solidFill>
-                  <a:srgbClr val="262626"/>
-                </a:solidFill>
-                <a:latin typeface="Meiryo"/>
-                <a:ea typeface="Meiryo"/>
-              </a:rPr>
-              <a:t>自動デプロイ / stg・prod</a:t>
+              <a:rPr sz="850" b="0">
+                <a:solidFill>
+                  <a:srgbClr val="262626"/>
+                </a:solidFill>
+                <a:latin typeface="Meiryo"/>
+                <a:ea typeface="Meiryo"/>
+              </a:rPr>
+              <a:t>自動デプロイ・stg/prod</a:t>
+            </a:r>
+          </a:p>
+          <a:p>
+            <a:pPr algn="ctr"/>
+            <a:r>
+              <a:rPr sz="850" b="0">
+                <a:solidFill>
+                  <a:srgbClr val="262626"/>
+                </a:solidFill>
+                <a:latin typeface="Meiryo"/>
+                <a:ea typeface="Meiryo"/>
+              </a:rPr>
+              <a:t>例: GitHub Actions /</a:t>
+            </a:r>
+          </a:p>
+          <a:p>
+            <a:pPr algn="ctr"/>
+            <a:r>
+              <a:rPr sz="850" b="0">
+                <a:solidFill>
+                  <a:srgbClr val="262626"/>
+                </a:solidFill>
+                <a:latin typeface="Meiryo"/>
+                <a:ea typeface="Meiryo"/>
+              </a:rPr>
+              <a:t>Terraform / AWS CDK</a:t>
             </a:r>
           </a:p>
         </p:txBody>
@@ -5506,8 +5740,8 @@
         </p:nvSpPr>
         <p:spPr>
           <a:xfrm>
-            <a:off x="8778240" y="4864608"/>
-            <a:ext cx="2514600" cy="914400"/>
+            <a:off x="8778240" y="4617720"/>
+            <a:ext cx="2514600" cy="1234440"/>
           </a:xfrm>
           <a:prstGeom prst="roundRect">
             <a:avLst/>
@@ -5542,7 +5776,7 @@
           <a:p>
             <a:pPr algn="ctr"/>
             <a:r>
-              <a:rPr sz="1100" b="1">
+              <a:rPr sz="1000" b="1">
                 <a:solidFill>
                   <a:srgbClr val="262626"/>
                 </a:solidFill>
@@ -5555,7 +5789,7 @@
           <a:p>
             <a:pPr algn="ctr"/>
             <a:r>
-              <a:rPr sz="950" b="0">
+              <a:rPr sz="850" b="0">
                 <a:solidFill>
                   <a:srgbClr val="262626"/>
                 </a:solidFill>
@@ -5563,6 +5797,32 @@
                 <a:ea typeface="Meiryo"/>
               </a:rPr>
               <a:t>WAF・最小権限IAM</a:t>
+            </a:r>
+          </a:p>
+          <a:p>
+            <a:pPr algn="ctr"/>
+            <a:r>
+              <a:rPr sz="850" b="0">
+                <a:solidFill>
+                  <a:srgbClr val="262626"/>
+                </a:solidFill>
+                <a:latin typeface="Meiryo"/>
+                <a:ea typeface="Meiryo"/>
+              </a:rPr>
+              <a:t>例: AWS WAF / Cloudflare /</a:t>
+            </a:r>
+          </a:p>
+          <a:p>
+            <a:pPr algn="ctr"/>
+            <a:r>
+              <a:rPr sz="850" b="0">
+                <a:solidFill>
+                  <a:srgbClr val="262626"/>
+                </a:solidFill>
+                <a:latin typeface="Meiryo"/>
+                <a:ea typeface="Meiryo"/>
+              </a:rPr>
+              <a:t>IAM</a:t>
             </a:r>
           </a:p>
         </p:txBody>
@@ -5575,7 +5835,7 @@
         </p:nvCxnSpPr>
         <p:spPr>
           <a:xfrm>
-            <a:off x="2148840" y="1737360"/>
+            <a:off x="2148840" y="1485900"/>
             <a:ext cx="182880" cy="0"/>
           </a:xfrm>
           <a:prstGeom prst="line">
@@ -5611,7 +5871,7 @@
         </p:nvCxnSpPr>
         <p:spPr>
           <a:xfrm>
-            <a:off x="4160520" y="1737360"/>
+            <a:off x="4160520" y="1485900"/>
             <a:ext cx="182880" cy="0"/>
           </a:xfrm>
           <a:prstGeom prst="line">
@@ -5647,7 +5907,7 @@
         </p:nvCxnSpPr>
         <p:spPr>
           <a:xfrm>
-            <a:off x="6537960" y="1737360"/>
+            <a:off x="6537960" y="1485900"/>
             <a:ext cx="182880" cy="0"/>
           </a:xfrm>
           <a:prstGeom prst="line">
@@ -5683,7 +5943,7 @@
         </p:nvCxnSpPr>
         <p:spPr>
           <a:xfrm>
-            <a:off x="8915400" y="1737360"/>
+            <a:off x="8915400" y="1485900"/>
             <a:ext cx="182880" cy="0"/>
           </a:xfrm>
           <a:prstGeom prst="line">
@@ -5719,8 +5979,8 @@
         </p:nvCxnSpPr>
         <p:spPr>
           <a:xfrm>
-            <a:off x="5440680" y="2286000"/>
-            <a:ext cx="0" cy="548640"/>
+            <a:off x="5440680" y="2103120"/>
+            <a:ext cx="0" cy="274320"/>
           </a:xfrm>
           <a:prstGeom prst="line">
             <a:avLst/>
@@ -5755,8 +6015,8 @@
         </p:nvCxnSpPr>
         <p:spPr>
           <a:xfrm>
-            <a:off x="6035040" y="2286000"/>
-            <a:ext cx="1097280" cy="548640"/>
+            <a:off x="6035040" y="2103120"/>
+            <a:ext cx="1188720" cy="274320"/>
           </a:xfrm>
           <a:prstGeom prst="line">
             <a:avLst/>
@@ -5791,8 +6051,8 @@
         </p:nvCxnSpPr>
         <p:spPr>
           <a:xfrm>
-            <a:off x="10195560" y="2286000"/>
-            <a:ext cx="0" cy="548640"/>
+            <a:off x="10195560" y="2103120"/>
+            <a:ext cx="0" cy="274320"/>
           </a:xfrm>
           <a:prstGeom prst="line">
             <a:avLst/>
@@ -5827,8 +6087,8 @@
         </p:nvCxnSpPr>
         <p:spPr>
           <a:xfrm>
-            <a:off x="10195560" y="3749039"/>
-            <a:ext cx="0" cy="182881"/>
+            <a:off x="10195560" y="3566160"/>
+            <a:ext cx="0" cy="137160"/>
           </a:xfrm>
           <a:prstGeom prst="line">
             <a:avLst/>
@@ -5886,8 +6146,7 @@
                 <a:latin typeface="Meiryo"/>
                 <a:ea typeface="Meiryo"/>
               </a:rPr>
-              <a:t>※ 無料枠の制限（レート/通数上限・時刻保証なし・状態を持てない）を解消。SLA・再試行/DLQ・監視・データ永続化・マルチチャネルで品質を担保。
-例) AWS: EventBridge Scheduler / SQS / Lambda / DynamoDB / Secrets Manager / CloudWatch ・ GCP: Cloud Scheduler / Pub-Sub / Cloud Run / Firestore / Secret Manager / Cloud Monitoring</a:t>
+              <a:t>※ 無料枠の制限（レート/通数上限・時刻保証なし・状態を持てない）を解消し、SLA・再試行/DLQ・監視・データ永続化・マルチチャネルで品質を担保。各ボックスの「例」は代表的な製品・サービス名（AWS / GCP / SaaS を横断）。</a:t>
             </a:r>
           </a:p>
         </p:txBody>
